--- a/Zeroth review- Real-Time Voice AI Agent for Banking Support & Legal Research Assistant for Indian Courts.pptx
+++ b/Zeroth review- Real-Time Voice AI Agent for Banking Support & Legal Research Assistant for Indian Courts.pptx
@@ -6,16 +6,14 @@
   </p:sldMasterIdLst>
   <p:sldIdLst>
     <p:sldId id="256" r:id="rId2"/>
-    <p:sldId id="261" r:id="rId3"/>
-    <p:sldId id="257" r:id="rId4"/>
-    <p:sldId id="263" r:id="rId5"/>
-    <p:sldId id="265" r:id="rId6"/>
-    <p:sldId id="266" r:id="rId7"/>
-    <p:sldId id="267" r:id="rId8"/>
-    <p:sldId id="262" r:id="rId9"/>
-    <p:sldId id="258" r:id="rId10"/>
-    <p:sldId id="259" r:id="rId11"/>
-    <p:sldId id="260" r:id="rId12"/>
+    <p:sldId id="268" r:id="rId3"/>
+    <p:sldId id="269" r:id="rId4"/>
+    <p:sldId id="266" r:id="rId5"/>
+    <p:sldId id="267" r:id="rId6"/>
+    <p:sldId id="262" r:id="rId7"/>
+    <p:sldId id="258" r:id="rId8"/>
+    <p:sldId id="259" r:id="rId9"/>
+    <p:sldId id="260" r:id="rId10"/>
   </p:sldIdLst>
   <p:sldSz cx="12192000" cy="6858000"/>
   <p:notesSz cx="6858000" cy="9144000"/>
@@ -3766,7 +3764,7 @@
           <a:p>
             <a:pPr algn="r"/>
             <a:r>
-              <a:rPr lang="en-US" sz="5600">
+              <a:rPr lang="en-US" sz="5600" dirty="0">
                 <a:solidFill>
                   <a:schemeClr val="tx1">
                     <a:lumMod val="75000"/>
@@ -3777,7 +3775,7 @@
               <a:t>Real-Time Voice AI Agent for Banking Support &amp; </a:t>
             </a:r>
             <a:r>
-              <a:rPr lang="en-GB" sz="5600">
+              <a:rPr lang="en-GB" sz="5600" dirty="0">
                 <a:solidFill>
                   <a:schemeClr val="tx1">
                     <a:lumMod val="75000"/>
@@ -3787,7 +3785,7 @@
               </a:rPr>
               <a:t>Legal Research Assistant for Indian Courts</a:t>
             </a:r>
-            <a:endParaRPr lang="en-IN" sz="5600">
+            <a:endParaRPr lang="en-IN" sz="5600" dirty="0">
               <a:solidFill>
                 <a:schemeClr val="tx1">
                   <a:lumMod val="75000"/>
@@ -4069,15 +4067,23 @@
 </p:sld>
 </file>
 
-<file path=ppt/slides/slide10.xml><?xml version="1.0" encoding="utf-8"?>
+<file path=ppt/slides/slide2.xml><?xml version="1.0" encoding="utf-8"?>
 <p:sld xmlns:a="http://schemas.openxmlformats.org/drawingml/2006/main" xmlns:r="http://schemas.openxmlformats.org/officeDocument/2006/relationships" xmlns:p="http://schemas.openxmlformats.org/presentationml/2006/main">
   <p:cSld>
+    <p:bg>
+      <p:bgPr>
+        <a:solidFill>
+          <a:schemeClr val="bg1"/>
+        </a:solidFill>
+        <a:effectLst/>
+      </p:bgPr>
+    </p:bg>
     <p:spTree>
       <p:nvGrpSpPr>
         <p:cNvPr id="1" name="">
           <a:extLst>
             <a:ext uri="{FF2B5EF4-FFF2-40B4-BE49-F238E27FC236}">
-              <a16:creationId xmlns:a16="http://schemas.microsoft.com/office/drawing/2014/main" id="{A4EF664E-6C7F-ED31-C5F2-AC6154D413CF}"/>
+              <a16:creationId xmlns:a16="http://schemas.microsoft.com/office/drawing/2014/main" id="{3E6318FB-1C1C-8D2A-F688-40AF9C482665}"/>
             </a:ext>
           </a:extLst>
         </p:cNvPr>
@@ -4092,12 +4098,174 @@
           <a:chExt cx="0" cy="0"/>
         </a:xfrm>
       </p:grpSpPr>
+      <p:sp useBgFill="1">
+        <p:nvSpPr>
+          <p:cNvPr id="9" name="Rectangle 8">
+            <a:extLst>
+              <a:ext uri="{FF2B5EF4-FFF2-40B4-BE49-F238E27FC236}">
+                <a16:creationId xmlns:a16="http://schemas.microsoft.com/office/drawing/2014/main" id="{886D4068-D045-48B0-9A00-198F2FE4B57C}"/>
+              </a:ext>
+              <a:ext uri="{C183D7F6-B498-43B3-948B-1728B52AA6E4}">
+                <adec:decorative xmlns:adec="http://schemas.microsoft.com/office/drawing/2017/decorative" val="1"/>
+              </a:ext>
+            </a:extLst>
+          </p:cNvPr>
+          <p:cNvSpPr>
+            <a:spLocks noGrp="1" noRot="1" noChangeAspect="1" noMove="1" noResize="1" noEditPoints="1" noAdjustHandles="1" noChangeArrowheads="1" noChangeShapeType="1" noTextEdit="1"/>
+          </p:cNvSpPr>
+          <p:nvPr>
+            <p:extLst>
+              <p:ext uri="{386F3935-93C4-4BCD-93E2-E3B085C9AB24}">
+                <p16:designElem xmlns:p16="http://schemas.microsoft.com/office/powerpoint/2015/main" val="1"/>
+              </p:ext>
+            </p:extLst>
+          </p:nvPr>
+        </p:nvSpPr>
+        <p:spPr>
+          <a:xfrm>
+            <a:off x="0" y="0"/>
+            <a:ext cx="12192000" cy="6858000"/>
+          </a:xfrm>
+          <a:prstGeom prst="rect">
+            <a:avLst/>
+          </a:prstGeom>
+          <a:ln>
+            <a:noFill/>
+          </a:ln>
+        </p:spPr>
+        <p:style>
+          <a:lnRef idx="2">
+            <a:schemeClr val="accent1">
+              <a:shade val="50000"/>
+            </a:schemeClr>
+          </a:lnRef>
+          <a:fillRef idx="1">
+            <a:schemeClr val="accent1"/>
+          </a:fillRef>
+          <a:effectRef idx="0">
+            <a:schemeClr val="accent1"/>
+          </a:effectRef>
+          <a:fontRef idx="minor">
+            <a:schemeClr val="lt1"/>
+          </a:fontRef>
+        </p:style>
+        <p:txBody>
+          <a:bodyPr rtlCol="0" anchor="ctr"/>
+          <a:lstStyle/>
+          <a:p>
+            <a:pPr algn="ctr"/>
+            <a:endParaRPr lang="en-US"/>
+          </a:p>
+        </p:txBody>
+      </p:sp>
+      <p:pic>
+        <p:nvPicPr>
+          <p:cNvPr id="5" name="Picture 4" descr="Angled shot of pen on a graph">
+            <a:extLst>
+              <a:ext uri="{FF2B5EF4-FFF2-40B4-BE49-F238E27FC236}">
+                <a16:creationId xmlns:a16="http://schemas.microsoft.com/office/drawing/2014/main" id="{C65FDF1C-7487-D662-A3B8-9D924640E351}"/>
+              </a:ext>
+            </a:extLst>
+          </p:cNvPr>
+          <p:cNvPicPr>
+            <a:picLocks noChangeAspect="1"/>
+          </p:cNvPicPr>
+          <p:nvPr/>
+        </p:nvPicPr>
+        <p:blipFill>
+          <a:blip r:embed="rId2">
+            <a:duotone>
+              <a:schemeClr val="bg2">
+                <a:shade val="45000"/>
+                <a:satMod val="135000"/>
+              </a:schemeClr>
+              <a:prstClr val="white"/>
+            </a:duotone>
+            <a:alphaModFix amt="25000"/>
+          </a:blip>
+          <a:srcRect t="9487" r="-1" b="6222"/>
+          <a:stretch>
+            <a:fillRect/>
+          </a:stretch>
+        </p:blipFill>
+        <p:spPr>
+          <a:xfrm>
+            <a:off x="0" y="-35527"/>
+            <a:ext cx="12188932" cy="6858000"/>
+          </a:xfrm>
+          <a:prstGeom prst="rect">
+            <a:avLst/>
+          </a:prstGeom>
+        </p:spPr>
+      </p:pic>
+      <p:sp>
+        <p:nvSpPr>
+          <p:cNvPr id="11" name="Rectangle 10">
+            <a:extLst>
+              <a:ext uri="{FF2B5EF4-FFF2-40B4-BE49-F238E27FC236}">
+                <a16:creationId xmlns:a16="http://schemas.microsoft.com/office/drawing/2014/main" id="{12664C4B-AAE2-4AA0-8918-134E8086F37E}"/>
+              </a:ext>
+              <a:ext uri="{C183D7F6-B498-43B3-948B-1728B52AA6E4}">
+                <adec:decorative xmlns:adec="http://schemas.microsoft.com/office/drawing/2017/decorative" val="1"/>
+              </a:ext>
+            </a:extLst>
+          </p:cNvPr>
+          <p:cNvSpPr>
+            <a:spLocks noGrp="1" noRot="1" noChangeAspect="1" noMove="1" noResize="1" noEditPoints="1" noAdjustHandles="1" noChangeArrowheads="1" noChangeShapeType="1" noTextEdit="1"/>
+          </p:cNvSpPr>
+          <p:nvPr>
+            <p:extLst>
+              <p:ext uri="{386F3935-93C4-4BCD-93E2-E3B085C9AB24}">
+                <p16:designElem xmlns:p16="http://schemas.microsoft.com/office/powerpoint/2015/main" val="1"/>
+              </p:ext>
+            </p:extLst>
+          </p:nvPr>
+        </p:nvSpPr>
+        <p:spPr>
+          <a:xfrm>
+            <a:off x="1" y="758952"/>
+            <a:ext cx="3443590" cy="5330952"/>
+          </a:xfrm>
+          <a:prstGeom prst="rect">
+            <a:avLst/>
+          </a:prstGeom>
+          <a:solidFill>
+            <a:schemeClr val="accent1"/>
+          </a:solidFill>
+          <a:ln>
+            <a:noFill/>
+          </a:ln>
+        </p:spPr>
+        <p:style>
+          <a:lnRef idx="2">
+            <a:schemeClr val="accent1">
+              <a:shade val="50000"/>
+            </a:schemeClr>
+          </a:lnRef>
+          <a:fillRef idx="1">
+            <a:schemeClr val="accent1"/>
+          </a:fillRef>
+          <a:effectRef idx="0">
+            <a:schemeClr val="accent1"/>
+          </a:effectRef>
+          <a:fontRef idx="minor">
+            <a:schemeClr val="lt1"/>
+          </a:fontRef>
+        </p:style>
+        <p:txBody>
+          <a:bodyPr/>
+          <a:lstStyle/>
+          <a:p>
+            <a:endParaRPr lang="en-IN"/>
+          </a:p>
+        </p:txBody>
+      </p:sp>
       <p:sp>
         <p:nvSpPr>
           <p:cNvPr id="2" name="Title 1">
             <a:extLst>
               <a:ext uri="{FF2B5EF4-FFF2-40B4-BE49-F238E27FC236}">
-                <a16:creationId xmlns:a16="http://schemas.microsoft.com/office/drawing/2014/main" id="{6EE74CBD-3BCE-AB1C-B7A0-55AF34786CB8}"/>
+                <a16:creationId xmlns:a16="http://schemas.microsoft.com/office/drawing/2014/main" id="{9B060889-9C2F-37BB-29FD-9EBB40D908BE}"/>
               </a:ext>
             </a:extLst>
           </p:cNvPr>
@@ -4108,32 +4276,12 @@
             <p:ph type="title"/>
           </p:nvPr>
         </p:nvSpPr>
-        <p:spPr/>
-        <p:txBody>
-          <a:bodyPr/>
-          <a:lstStyle/>
-          <a:p>
-            <a:endParaRPr lang="en-IN"/>
-          </a:p>
-        </p:txBody>
-      </p:sp>
-      <p:sp>
-        <p:nvSpPr>
-          <p:cNvPr id="3" name="Content Placeholder 2">
-            <a:extLst>
-              <a:ext uri="{FF2B5EF4-FFF2-40B4-BE49-F238E27FC236}">
-                <a16:creationId xmlns:a16="http://schemas.microsoft.com/office/drawing/2014/main" id="{85BBED03-0DBC-E411-C1AF-CE18EC85272F}"/>
-              </a:ext>
-            </a:extLst>
-          </p:cNvPr>
-          <p:cNvSpPr>
-            <a:spLocks noGrp="1"/>
-          </p:cNvSpPr>
-          <p:nvPr>
-            <p:ph idx="1"/>
-          </p:nvPr>
-        </p:nvSpPr>
-        <p:spPr/>
+        <p:spPr>
+          <a:xfrm>
+            <a:off x="252919" y="1123837"/>
+            <a:ext cx="2947482" cy="4601183"/>
+          </a:xfrm>
+        </p:spPr>
         <p:txBody>
           <a:bodyPr>
             <a:normAutofit/>
@@ -4141,120 +4289,19 @@
           <a:lstStyle/>
           <a:p>
             <a:r>
-              <a:rPr lang="en-IN" dirty="0"/>
-              <a:t>Anand, L. G. (2025). From Voice to Value: The Expanding Role of AI in Communication and Financial Services.</a:t>
-            </a:r>
-          </a:p>
-          <a:p>
-            <a:r>
-              <a:rPr lang="en-IN" dirty="0" err="1"/>
-              <a:t>Chitraju</a:t>
-            </a:r>
-            <a:r>
-              <a:rPr lang="en-IN" dirty="0"/>
-              <a:t>, S. (2025). Smart Systems, Smarter Decisions: AI Applications in Voice Recognition, User Support, and Financial Services. </a:t>
-            </a:r>
-            <a:r>
-              <a:rPr lang="en-IN" i="1" dirty="0"/>
-              <a:t>Smarter Decisions: AI Applications in Voice Recognition, User Support, and Financial Services (August 18, 2025)</a:t>
-            </a:r>
-            <a:r>
-              <a:rPr lang="en-IN" dirty="0"/>
-              <a:t>.</a:t>
-            </a:r>
-          </a:p>
-          <a:p>
-            <a:r>
-              <a:rPr lang="en-IN" dirty="0" err="1"/>
-              <a:t>Henkens</a:t>
-            </a:r>
-            <a:r>
-              <a:rPr lang="en-IN" dirty="0"/>
-              <a:t>, B., Schultz, C. D., De Keyser, A., &amp; Mahr, D. (2026). The sound of progress: AI voice agents in service. </a:t>
-            </a:r>
-            <a:r>
-              <a:rPr lang="en-IN" i="1" dirty="0"/>
-              <a:t>Journal of Service Management</a:t>
-            </a:r>
-            <a:r>
-              <a:rPr lang="en-IN" dirty="0"/>
-              <a:t>, </a:t>
-            </a:r>
-            <a:r>
-              <a:rPr lang="en-IN" i="1" dirty="0"/>
-              <a:t>37</a:t>
-            </a:r>
-            <a:r>
-              <a:rPr lang="en-IN" dirty="0"/>
-              <a:t>(1), 1-32.</a:t>
-            </a:r>
-          </a:p>
-          <a:p>
-            <a:r>
-              <a:rPr lang="en-IN" dirty="0"/>
-              <a:t>Parthiban, E. S., &amp; Adil, M. (2023). Trends in the AI-based banking conversational agents literature: a bibliometric review. </a:t>
-            </a:r>
-            <a:r>
-              <a:rPr lang="en-IN" i="1" dirty="0"/>
-              <a:t>Asia pacific journal of information systems</a:t>
-            </a:r>
-            <a:r>
-              <a:rPr lang="en-IN" dirty="0"/>
-              <a:t>, </a:t>
-            </a:r>
-            <a:r>
-              <a:rPr lang="en-IN" i="1" dirty="0"/>
-              <a:t>33</a:t>
-            </a:r>
-            <a:r>
-              <a:rPr lang="en-IN" dirty="0"/>
-              <a:t>(3), 702-736.</a:t>
-            </a:r>
-          </a:p>
-        </p:txBody>
-      </p:sp>
-    </p:spTree>
-    <p:extLst>
-      <p:ext uri="{BB962C8B-B14F-4D97-AF65-F5344CB8AC3E}">
-        <p14:creationId xmlns:p14="http://schemas.microsoft.com/office/powerpoint/2010/main" val="52899601"/>
-      </p:ext>
-    </p:extLst>
-  </p:cSld>
-  <p:clrMapOvr>
-    <a:masterClrMapping/>
-  </p:clrMapOvr>
-</p:sld>
-</file>
-
-<file path=ppt/slides/slide11.xml><?xml version="1.0" encoding="utf-8"?>
-<p:sld xmlns:a="http://schemas.openxmlformats.org/drawingml/2006/main" xmlns:r="http://schemas.openxmlformats.org/officeDocument/2006/relationships" xmlns:p="http://schemas.openxmlformats.org/presentationml/2006/main">
-  <p:cSld>
-    <p:spTree>
-      <p:nvGrpSpPr>
-        <p:cNvPr id="1" name="">
-          <a:extLst>
-            <a:ext uri="{FF2B5EF4-FFF2-40B4-BE49-F238E27FC236}">
-              <a16:creationId xmlns:a16="http://schemas.microsoft.com/office/drawing/2014/main" id="{407AC10E-BAA4-0871-F56B-4D6EB74AB5DA}"/>
-            </a:ext>
-          </a:extLst>
-        </p:cNvPr>
-        <p:cNvGrpSpPr/>
-        <p:nvPr/>
-      </p:nvGrpSpPr>
-      <p:grpSpPr>
-        <a:xfrm>
-          <a:off x="0" y="0"/>
-          <a:ext cx="0" cy="0"/>
-          <a:chOff x="0" y="0"/>
-          <a:chExt cx="0" cy="0"/>
-        </a:xfrm>
-      </p:grpSpPr>
-      <p:sp>
-        <p:nvSpPr>
-          <p:cNvPr id="2" name="Title 1">
+              <a:rPr lang="en-GB" dirty="0"/>
+              <a:t>Real-Time Voice AI Agent for Banking Support </a:t>
+            </a:r>
+            <a:endParaRPr lang="en-IN" dirty="0"/>
+          </a:p>
+        </p:txBody>
+      </p:sp>
+      <p:sp>
+        <p:nvSpPr>
+          <p:cNvPr id="3" name="Content Placeholder 2">
             <a:extLst>
               <a:ext uri="{FF2B5EF4-FFF2-40B4-BE49-F238E27FC236}">
-                <a16:creationId xmlns:a16="http://schemas.microsoft.com/office/drawing/2014/main" id="{D70092DC-C61C-3B18-D742-1900F41B2E12}"/>
+                <a16:creationId xmlns:a16="http://schemas.microsoft.com/office/drawing/2014/main" id="{B831D473-6890-E1E6-CCFF-39703D89B487}"/>
               </a:ext>
             </a:extLst>
           </p:cNvPr>
@@ -4262,468 +4309,138 @@
             <a:spLocks noGrp="1"/>
           </p:cNvSpPr>
           <p:nvPr>
-            <p:ph type="title"/>
-          </p:nvPr>
-        </p:nvSpPr>
-        <p:spPr/>
-        <p:txBody>
-          <a:bodyPr/>
-          <a:lstStyle/>
-          <a:p>
-            <a:endParaRPr lang="en-IN"/>
-          </a:p>
-        </p:txBody>
-      </p:sp>
-      <p:sp>
-        <p:nvSpPr>
-          <p:cNvPr id="3" name="Content Placeholder 2">
-            <a:extLst>
-              <a:ext uri="{FF2B5EF4-FFF2-40B4-BE49-F238E27FC236}">
-                <a16:creationId xmlns:a16="http://schemas.microsoft.com/office/drawing/2014/main" id="{EF2EE86E-AFC8-8DF6-B6AB-4A95D13DACF1}"/>
-              </a:ext>
-            </a:extLst>
-          </p:cNvPr>
-          <p:cNvSpPr>
-            <a:spLocks noGrp="1"/>
-          </p:cNvSpPr>
-          <p:nvPr>
             <p:ph idx="1"/>
           </p:nvPr>
         </p:nvSpPr>
-        <p:spPr/>
+        <p:spPr>
+          <a:xfrm>
+            <a:off x="3869268" y="517161"/>
+            <a:ext cx="7315200" cy="2928403"/>
+          </a:xfrm>
+        </p:spPr>
         <p:txBody>
           <a:bodyPr>
             <a:normAutofit/>
           </a:bodyPr>
           <a:lstStyle/>
           <a:p>
-            <a:r>
-              <a:rPr lang="en-IN" dirty="0"/>
-              <a:t>Mastrandrea, M. (2024). </a:t>
-            </a:r>
-            <a:r>
-              <a:rPr lang="en-IN" i="1" dirty="0"/>
-              <a:t>Developing an AI-Powered Voice Assistant for an iOS Payment App</a:t>
-            </a:r>
-            <a:r>
-              <a:rPr lang="en-IN" dirty="0"/>
-              <a:t> (Doctoral dissertation, </a:t>
-            </a:r>
-            <a:r>
-              <a:rPr lang="en-IN" dirty="0" err="1"/>
-              <a:t>Politecnico</a:t>
-            </a:r>
-            <a:r>
-              <a:rPr lang="en-IN" dirty="0"/>
-              <a:t> di Torino).</a:t>
-            </a:r>
-          </a:p>
-          <a:p>
-            <a:r>
-              <a:rPr lang="en-IN" dirty="0"/>
-              <a:t>Doherty, D., &amp; Curran, K. (2019, December). Chatbots for online banking services. In </a:t>
-            </a:r>
-            <a:r>
-              <a:rPr lang="en-IN" i="1" dirty="0"/>
-              <a:t>Web Intelligence</a:t>
-            </a:r>
-            <a:r>
-              <a:rPr lang="en-IN" dirty="0"/>
-              <a:t> (Vol. 17, No. 4, pp. 327-342). Sage UK: London, England: SAGE Publications.</a:t>
-            </a:r>
-          </a:p>
-          <a:p>
-            <a:r>
-              <a:rPr lang="en-IN" dirty="0"/>
-              <a:t>Paul, V. (2025). Voice AI Agents: The Technical Backbone of Modern Speech Interfaces. </a:t>
-            </a:r>
-            <a:r>
-              <a:rPr lang="en-IN" i="1" dirty="0"/>
-              <a:t>Journal Of Multidisciplinary</a:t>
-            </a:r>
-            <a:r>
-              <a:rPr lang="en-IN" dirty="0"/>
-              <a:t>, </a:t>
-            </a:r>
-            <a:r>
-              <a:rPr lang="en-IN" i="1" dirty="0"/>
-              <a:t>5</a:t>
-            </a:r>
-            <a:r>
-              <a:rPr lang="en-IN" dirty="0"/>
-              <a:t>(7), 610-617.</a:t>
-            </a:r>
-          </a:p>
-        </p:txBody>
-      </p:sp>
-    </p:spTree>
-    <p:extLst>
-      <p:ext uri="{BB962C8B-B14F-4D97-AF65-F5344CB8AC3E}">
-        <p14:creationId xmlns:p14="http://schemas.microsoft.com/office/powerpoint/2010/main" val="3833798129"/>
-      </p:ext>
-    </p:extLst>
-  </p:cSld>
-  <p:clrMapOvr>
-    <a:masterClrMapping/>
-  </p:clrMapOvr>
-</p:sld>
-</file>
-
-<file path=ppt/slides/slide2.xml><?xml version="1.0" encoding="utf-8"?>
-<p:sld xmlns:a="http://schemas.openxmlformats.org/drawingml/2006/main" xmlns:r="http://schemas.openxmlformats.org/officeDocument/2006/relationships" xmlns:p="http://schemas.openxmlformats.org/presentationml/2006/main">
-  <p:cSld>
-    <p:spTree>
-      <p:nvGrpSpPr>
-        <p:cNvPr id="1" name=""/>
-        <p:cNvGrpSpPr/>
-        <p:nvPr/>
-      </p:nvGrpSpPr>
-      <p:grpSpPr>
-        <a:xfrm>
-          <a:off x="0" y="0"/>
-          <a:ext cx="0" cy="0"/>
-          <a:chOff x="0" y="0"/>
-          <a:chExt cx="0" cy="0"/>
-        </a:xfrm>
-      </p:grpSpPr>
-      <p:sp>
-        <p:nvSpPr>
-          <p:cNvPr id="2" name="Title 1">
+            <a:pPr marL="0" indent="0">
+              <a:buNone/>
+            </a:pPr>
+            <a:r>
+              <a:rPr lang="en-US" sz="1400" b="1" dirty="0"/>
+              <a:t>Problem Statement</a:t>
+            </a:r>
+            <a:endParaRPr lang="en-US" sz="1100" b="1" dirty="0"/>
+          </a:p>
+          <a:p>
+            <a:r>
+              <a:rPr lang="en-US" sz="1100" dirty="0"/>
+              <a:t>Indian private banks handle over 10 million support calls monthly with 6-plus minute average handle times and high IVR frustration, leading to poor CSAT scores and customer churn. Tier-1 queries such as balance checks, card blocks, and EMI schedules represent 60% of call volume but consume the same agent time as complex issues.</a:t>
+            </a:r>
+          </a:p>
+          <a:p>
+            <a:endParaRPr lang="en-US" sz="1100" dirty="0"/>
+          </a:p>
+          <a:p>
+            <a:pPr marL="0" indent="0">
+              <a:buNone/>
+            </a:pPr>
+            <a:r>
+              <a:rPr lang="en-US" sz="1400" b="1" dirty="0"/>
+              <a:t>Solution Overview</a:t>
+            </a:r>
+            <a:endParaRPr lang="en-US" sz="1100" b="1" dirty="0"/>
+          </a:p>
+          <a:p>
+            <a:r>
+              <a:rPr lang="en-US" sz="1100" dirty="0"/>
+              <a:t>A real-time voice AI agent using </a:t>
+            </a:r>
+            <a:r>
+              <a:rPr lang="en-US" sz="1100" dirty="0" err="1"/>
+              <a:t>Pipecat</a:t>
+            </a:r>
+            <a:r>
+              <a:rPr lang="en-US" sz="1100" dirty="0"/>
+              <a:t> for call orchestration, faster-whisper for streaming speech-to-text, Coqui TTS for text-to-speech, and a RAG backend grounded on bank policy documents. The agent handles Tier-1 queries and escalates complex queries to human agents with full conversation context and entity summary.</a:t>
+            </a:r>
+          </a:p>
+          <a:p>
+            <a:endParaRPr lang="en-US" sz="1100" dirty="0"/>
+          </a:p>
+          <a:p>
+            <a:endParaRPr lang="en-US" sz="1100" dirty="0"/>
+          </a:p>
+          <a:p>
+            <a:pPr marL="0" indent="0">
+              <a:buNone/>
+            </a:pPr>
+            <a:endParaRPr lang="en-IN" sz="1100" dirty="0"/>
+          </a:p>
+        </p:txBody>
+      </p:sp>
+      <p:sp>
+        <p:nvSpPr>
+          <p:cNvPr id="13" name="Rectangle 12">
             <a:extLst>
               <a:ext uri="{FF2B5EF4-FFF2-40B4-BE49-F238E27FC236}">
-                <a16:creationId xmlns:a16="http://schemas.microsoft.com/office/drawing/2014/main" id="{197290E7-4F72-0E25-6210-7215851EABB0}"/>
+                <a16:creationId xmlns:a16="http://schemas.microsoft.com/office/drawing/2014/main" id="{616F9FD8-4CFE-4C77-8F29-5D801C57E2AB}"/>
+              </a:ext>
+              <a:ext uri="{C183D7F6-B498-43B3-948B-1728B52AA6E4}">
+                <adec:decorative xmlns:adec="http://schemas.microsoft.com/office/drawing/2017/decorative" val="1"/>
               </a:ext>
             </a:extLst>
           </p:cNvPr>
           <p:cNvSpPr>
-            <a:spLocks noGrp="1"/>
-          </p:cNvSpPr>
-          <p:nvPr>
-            <p:ph type="title"/>
-          </p:nvPr>
-        </p:nvSpPr>
-        <p:spPr/>
+            <a:spLocks noGrp="1" noRot="1" noChangeAspect="1" noMove="1" noResize="1" noEditPoints="1" noAdjustHandles="1" noChangeArrowheads="1" noChangeShapeType="1" noTextEdit="1"/>
+          </p:cNvSpPr>
+          <p:nvPr>
+            <p:extLst>
+              <p:ext uri="{386F3935-93C4-4BCD-93E2-E3B085C9AB24}">
+                <p16:designElem xmlns:p16="http://schemas.microsoft.com/office/powerpoint/2015/main" val="1"/>
+              </p:ext>
+            </p:extLst>
+          </p:nvPr>
+        </p:nvSpPr>
+        <p:spPr>
+          <a:xfrm>
+            <a:off x="11815864" y="758952"/>
+            <a:ext cx="384048" cy="5330952"/>
+          </a:xfrm>
+          <a:prstGeom prst="rect">
+            <a:avLst/>
+          </a:prstGeom>
+          <a:solidFill>
+            <a:srgbClr val="C8C8C8">
+              <a:alpha val="49804"/>
+            </a:srgbClr>
+          </a:solidFill>
+          <a:ln>
+            <a:noFill/>
+          </a:ln>
+        </p:spPr>
+        <p:style>
+          <a:lnRef idx="2">
+            <a:schemeClr val="accent1">
+              <a:shade val="50000"/>
+            </a:schemeClr>
+          </a:lnRef>
+          <a:fillRef idx="1">
+            <a:schemeClr val="accent1"/>
+          </a:fillRef>
+          <a:effectRef idx="0">
+            <a:schemeClr val="accent1"/>
+          </a:effectRef>
+          <a:fontRef idx="minor">
+            <a:schemeClr val="lt1"/>
+          </a:fontRef>
+        </p:style>
         <p:txBody>
           <a:bodyPr/>
           <a:lstStyle/>
           <a:p>
-            <a:r>
-              <a:rPr lang="en-US" dirty="0"/>
-              <a:t>Problem Statement</a:t>
-            </a:r>
-            <a:endParaRPr lang="en-IN" dirty="0"/>
-          </a:p>
-        </p:txBody>
-      </p:sp>
-      <p:sp>
-        <p:nvSpPr>
-          <p:cNvPr id="3" name="Content Placeholder 2">
-            <a:extLst>
-              <a:ext uri="{FF2B5EF4-FFF2-40B4-BE49-F238E27FC236}">
-                <a16:creationId xmlns:a16="http://schemas.microsoft.com/office/drawing/2014/main" id="{3C88FDA5-DD38-F62F-E6EF-34577DDF65FE}"/>
-              </a:ext>
-            </a:extLst>
-          </p:cNvPr>
-          <p:cNvSpPr>
-            <a:spLocks noGrp="1"/>
-          </p:cNvSpPr>
-          <p:nvPr>
-            <p:ph idx="1"/>
-          </p:nvPr>
-        </p:nvSpPr>
-        <p:spPr>
-          <a:xfrm>
-            <a:off x="3869268" y="864107"/>
-            <a:ext cx="7315200" cy="5236889"/>
-          </a:xfrm>
-        </p:spPr>
-        <p:txBody>
-          <a:bodyPr>
-            <a:normAutofit lnSpcReduction="10000"/>
-          </a:bodyPr>
-          <a:lstStyle/>
-          <a:p>
-            <a:r>
-              <a:rPr lang="en-US" sz="2400" dirty="0"/>
-              <a:t>Indian private banks handle over 10 million support calls monthly with 6-plus minute average handle times and high IVR frustration, leading to poor CSAT scores and customer churn. Tier-1 queries such as balance checks, card blocks, and EMI schedules represent 60% of call volume but consume the same agent time as complex issues.</a:t>
-            </a:r>
-          </a:p>
-          <a:p>
-            <a:endParaRPr lang="en-US" sz="2400" dirty="0"/>
-          </a:p>
-          <a:p>
-            <a:r>
-              <a:rPr lang="en-US" sz="2400" dirty="0"/>
-              <a:t>Junior advocates spend weeks searching thousands of Supreme Court and High Court judgments on rulings to find relevant precedents, which is a slow and incomplete process. Senior lawyer time for research costs between 2,000 and 10,000 rupees per hour, making thorough legal research economically inaccessible for small firms.</a:t>
-            </a:r>
-            <a:endParaRPr lang="en-IN" sz="2400" dirty="0"/>
-          </a:p>
-          <a:p>
-            <a:endParaRPr lang="en-US" sz="2400" dirty="0"/>
-          </a:p>
-          <a:p>
-            <a:endParaRPr lang="en-IN" sz="2400" dirty="0"/>
-          </a:p>
-        </p:txBody>
-      </p:sp>
-    </p:spTree>
-    <p:extLst>
-      <p:ext uri="{BB962C8B-B14F-4D97-AF65-F5344CB8AC3E}">
-        <p14:creationId xmlns:p14="http://schemas.microsoft.com/office/powerpoint/2010/main" val="1465024936"/>
-      </p:ext>
-    </p:extLst>
-  </p:cSld>
-  <p:clrMapOvr>
-    <a:masterClrMapping/>
-  </p:clrMapOvr>
-</p:sld>
-</file>
-
-<file path=ppt/slides/slide3.xml><?xml version="1.0" encoding="utf-8"?>
-<p:sld xmlns:a="http://schemas.openxmlformats.org/drawingml/2006/main" xmlns:r="http://schemas.openxmlformats.org/officeDocument/2006/relationships" xmlns:p="http://schemas.openxmlformats.org/presentationml/2006/main">
-  <p:cSld>
-    <p:spTree>
-      <p:nvGrpSpPr>
-        <p:cNvPr id="1" name=""/>
-        <p:cNvGrpSpPr/>
-        <p:nvPr/>
-      </p:nvGrpSpPr>
-      <p:grpSpPr>
-        <a:xfrm>
-          <a:off x="0" y="0"/>
-          <a:ext cx="0" cy="0"/>
-          <a:chOff x="0" y="0"/>
-          <a:chExt cx="0" cy="0"/>
-        </a:xfrm>
-      </p:grpSpPr>
-      <p:sp>
-        <p:nvSpPr>
-          <p:cNvPr id="2" name="Title 1">
-            <a:extLst>
-              <a:ext uri="{FF2B5EF4-FFF2-40B4-BE49-F238E27FC236}">
-                <a16:creationId xmlns:a16="http://schemas.microsoft.com/office/drawing/2014/main" id="{962169DA-6F6C-52CA-596D-C7792DC2075A}"/>
-              </a:ext>
-            </a:extLst>
-          </p:cNvPr>
-          <p:cNvSpPr>
-            <a:spLocks noGrp="1"/>
-          </p:cNvSpPr>
-          <p:nvPr>
-            <p:ph type="title"/>
-          </p:nvPr>
-        </p:nvSpPr>
-        <p:spPr/>
-        <p:txBody>
-          <a:bodyPr/>
-          <a:lstStyle/>
-          <a:p>
-            <a:r>
-              <a:rPr lang="en-US" dirty="0"/>
-              <a:t>Solution Overview</a:t>
-            </a:r>
-            <a:endParaRPr lang="en-IN" dirty="0"/>
-          </a:p>
-        </p:txBody>
-      </p:sp>
-      <p:sp>
-        <p:nvSpPr>
-          <p:cNvPr id="3" name="Content Placeholder 2">
-            <a:extLst>
-              <a:ext uri="{FF2B5EF4-FFF2-40B4-BE49-F238E27FC236}">
-                <a16:creationId xmlns:a16="http://schemas.microsoft.com/office/drawing/2014/main" id="{DF8CC0C6-7675-AE22-8160-0E0C3991D8E6}"/>
-              </a:ext>
-            </a:extLst>
-          </p:cNvPr>
-          <p:cNvSpPr>
-            <a:spLocks noGrp="1"/>
-          </p:cNvSpPr>
-          <p:nvPr>
-            <p:ph idx="1"/>
-          </p:nvPr>
-        </p:nvSpPr>
-        <p:spPr>
-          <a:xfrm>
-            <a:off x="3869268" y="864108"/>
-            <a:ext cx="7315200" cy="5326830"/>
-          </a:xfrm>
-        </p:spPr>
-        <p:txBody>
-          <a:bodyPr>
-            <a:normAutofit lnSpcReduction="10000"/>
-          </a:bodyPr>
-          <a:lstStyle/>
-          <a:p>
-            <a:r>
-              <a:rPr lang="en-US" sz="2400" dirty="0"/>
-              <a:t>A real-time voice AI agent using </a:t>
-            </a:r>
-            <a:r>
-              <a:rPr lang="en-US" sz="2400" dirty="0" err="1"/>
-              <a:t>Pipecat</a:t>
-            </a:r>
-            <a:r>
-              <a:rPr lang="en-US" sz="2400" dirty="0"/>
-              <a:t> for call orchestration, faster-whisper for streaming speech-to-text, Coqui TTS for text-to-speech, and a RAG backend grounded on bank policy documents. The agent handles Tier-1 queries and escalates complex queries to human agents with full conversation context and entity summary.</a:t>
-            </a:r>
-          </a:p>
-          <a:p>
-            <a:endParaRPr lang="en-US" sz="2400" dirty="0"/>
-          </a:p>
-          <a:p>
-            <a:r>
-              <a:rPr lang="en-US" sz="2400" dirty="0"/>
-              <a:t>A RAG application over the Indian Kanoon corpus and uploaded case files using legal-domain embeddings, two-stage hybrid retrieval, and LLM-based holding extraction, enabling advocates to find relevant precedents, extract ratio decidendi, and auto-draft structured argument outlines with citation-linked evidence.</a:t>
-            </a:r>
-            <a:endParaRPr lang="en-IN" sz="2400" dirty="0"/>
-          </a:p>
-          <a:p>
-            <a:endParaRPr lang="en-IN" sz="2400" dirty="0"/>
-          </a:p>
-        </p:txBody>
-      </p:sp>
-    </p:spTree>
-    <p:extLst>
-      <p:ext uri="{BB962C8B-B14F-4D97-AF65-F5344CB8AC3E}">
-        <p14:creationId xmlns:p14="http://schemas.microsoft.com/office/powerpoint/2010/main" val="2470409146"/>
-      </p:ext>
-    </p:extLst>
-  </p:cSld>
-  <p:clrMapOvr>
-    <a:masterClrMapping/>
-  </p:clrMapOvr>
-</p:sld>
-</file>
-
-<file path=ppt/slides/slide4.xml><?xml version="1.0" encoding="utf-8"?>
-<p:sld xmlns:a="http://schemas.openxmlformats.org/drawingml/2006/main" xmlns:r="http://schemas.openxmlformats.org/officeDocument/2006/relationships" xmlns:p="http://schemas.openxmlformats.org/presentationml/2006/main">
-  <p:cSld>
-    <p:spTree>
-      <p:nvGrpSpPr>
-        <p:cNvPr id="1" name="">
-          <a:extLst>
-            <a:ext uri="{FF2B5EF4-FFF2-40B4-BE49-F238E27FC236}">
-              <a16:creationId xmlns:a16="http://schemas.microsoft.com/office/drawing/2014/main" id="{33EF024D-CED2-D21A-F747-F39E713D0F02}"/>
-            </a:ext>
-          </a:extLst>
-        </p:cNvPr>
-        <p:cNvGrpSpPr/>
-        <p:nvPr/>
-      </p:nvGrpSpPr>
-      <p:grpSpPr>
-        <a:xfrm>
-          <a:off x="0" y="0"/>
-          <a:ext cx="0" cy="0"/>
-          <a:chOff x="0" y="0"/>
-          <a:chExt cx="0" cy="0"/>
-        </a:xfrm>
-      </p:grpSpPr>
-      <p:sp>
-        <p:nvSpPr>
-          <p:cNvPr id="2" name="Title 1">
-            <a:extLst>
-              <a:ext uri="{FF2B5EF4-FFF2-40B4-BE49-F238E27FC236}">
-                <a16:creationId xmlns:a16="http://schemas.microsoft.com/office/drawing/2014/main" id="{196ABBE1-CE10-E849-9B50-BF2B057982FB}"/>
-              </a:ext>
-            </a:extLst>
-          </p:cNvPr>
-          <p:cNvSpPr>
-            <a:spLocks noGrp="1"/>
-          </p:cNvSpPr>
-          <p:nvPr>
-            <p:ph type="title"/>
-          </p:nvPr>
-        </p:nvSpPr>
-        <p:spPr/>
-        <p:txBody>
-          <a:bodyPr/>
-          <a:lstStyle/>
-          <a:p>
-            <a:r>
-              <a:rPr lang="en-US" dirty="0"/>
-              <a:t>Objectives</a:t>
-            </a:r>
-            <a:endParaRPr lang="en-IN" dirty="0"/>
-          </a:p>
-        </p:txBody>
-      </p:sp>
-      <p:sp>
-        <p:nvSpPr>
-          <p:cNvPr id="3" name="Content Placeholder 2">
-            <a:extLst>
-              <a:ext uri="{FF2B5EF4-FFF2-40B4-BE49-F238E27FC236}">
-                <a16:creationId xmlns:a16="http://schemas.microsoft.com/office/drawing/2014/main" id="{33F11905-8014-F6A7-DFA7-867B7EC16577}"/>
-              </a:ext>
-            </a:extLst>
-          </p:cNvPr>
-          <p:cNvSpPr>
-            <a:spLocks noGrp="1"/>
-          </p:cNvSpPr>
-          <p:nvPr>
-            <p:ph idx="1"/>
-          </p:nvPr>
-        </p:nvSpPr>
-        <p:spPr>
-          <a:xfrm>
-            <a:off x="3582649" y="419725"/>
-            <a:ext cx="8169640" cy="3009275"/>
-          </a:xfrm>
-        </p:spPr>
-        <p:txBody>
-          <a:bodyPr>
-            <a:normAutofit fontScale="92500" lnSpcReduction="20000"/>
-          </a:bodyPr>
-          <a:lstStyle/>
-          <a:p>
-            <a:pPr marL="0" indent="0">
-              <a:buNone/>
-            </a:pPr>
-            <a:r>
-              <a:rPr lang="en-US" sz="1800" b="1" dirty="0"/>
-              <a:t>Project 1</a:t>
-            </a:r>
-          </a:p>
-          <a:p>
-            <a:r>
-              <a:rPr lang="en-US" sz="1800" dirty="0"/>
-              <a:t>End-to-end voice pipeline: browser mic or Asterisk to faster-whisper STT to intent detection to RAG to Coqui TTS.</a:t>
-            </a:r>
-          </a:p>
-          <a:p>
-            <a:r>
-              <a:rPr lang="en-US" sz="1800" dirty="0"/>
-              <a:t>RAG knowledge base over bank FAQ PDFs, policy documents, and product sheets.</a:t>
-            </a:r>
-          </a:p>
-          <a:p>
-            <a:r>
-              <a:rPr lang="en-US" sz="1800" dirty="0"/>
-              <a:t>Intent classifier for banking: balance, card block, EMI, NEFT, cheque, FD, and more.</a:t>
-            </a:r>
-          </a:p>
-          <a:p>
-            <a:r>
-              <a:rPr lang="en-IN" sz="1800" dirty="0"/>
-              <a:t>Seamless human escalation</a:t>
-            </a:r>
-          </a:p>
-          <a:p>
-            <a:r>
-              <a:rPr lang="en-US" sz="1800" dirty="0"/>
-              <a:t>Call analytics dashboard: intent distribution, resolution rate, and average handle time</a:t>
-            </a:r>
-          </a:p>
-          <a:p>
-            <a:r>
-              <a:rPr lang="en-US" sz="1800" dirty="0"/>
-              <a:t>DTMF keypad fallback for low-network conditions</a:t>
-            </a:r>
-          </a:p>
-          <a:p>
-            <a:r>
-              <a:rPr lang="en-US" sz="1800" dirty="0"/>
-              <a:t>WebSocket-based deployment with Redis session management</a:t>
-            </a:r>
-            <a:endParaRPr lang="en-IN" sz="1800" dirty="0"/>
+            <a:endParaRPr lang="en-IN"/>
           </a:p>
         </p:txBody>
       </p:sp>
@@ -4732,7 +4449,7 @@
           <p:cNvPr id="4" name="Content Placeholder 2">
             <a:extLst>
               <a:ext uri="{FF2B5EF4-FFF2-40B4-BE49-F238E27FC236}">
-                <a16:creationId xmlns:a16="http://schemas.microsoft.com/office/drawing/2014/main" id="{C1F5606B-AFB5-0105-931E-215446FD92D6}"/>
+                <a16:creationId xmlns:a16="http://schemas.microsoft.com/office/drawing/2014/main" id="{FE84A49E-D421-0452-0F74-DDB6CAFD93A7}"/>
               </a:ext>
             </a:extLst>
           </p:cNvPr>
@@ -4743,8 +4460,8 @@
         </p:nvSpPr>
         <p:spPr>
           <a:xfrm>
-            <a:off x="3582649" y="3429000"/>
-            <a:ext cx="8169640" cy="3009275"/>
+            <a:off x="3869268" y="2739190"/>
+            <a:ext cx="7315200" cy="1223535"/>
           </a:xfrm>
           <a:prstGeom prst="rect">
             <a:avLst/>
@@ -4752,7 +4469,7 @@
         </p:spPr>
         <p:txBody>
           <a:bodyPr vert="horz" lIns="91440" tIns="45720" rIns="91440" bIns="45720" rtlCol="0" anchor="ctr">
-            <a:normAutofit lnSpcReduction="10000"/>
+            <a:normAutofit/>
           </a:bodyPr>
           <a:lstStyle>
             <a:lvl1pPr marL="182880" indent="-182880" algn="l" defTabSz="914400" rtl="0" eaLnBrk="1" latinLnBrk="0" hangingPunct="1">
@@ -4998,194 +4715,37 @@
           </a:lstStyle>
           <a:p>
             <a:pPr marL="0" indent="0">
+              <a:buFont typeface="Wingdings 2" pitchFamily="18" charset="2"/>
               <a:buNone/>
             </a:pPr>
             <a:r>
-              <a:rPr lang="en-US" sz="1900" b="1" dirty="0"/>
-              <a:t>Project 2</a:t>
-            </a:r>
-            <a:endParaRPr lang="en-US" sz="1800" b="1" dirty="0"/>
-          </a:p>
-          <a:p>
-            <a:pPr marL="342900" indent="-342900">
-              <a:buFont typeface="Arial" panose="020B0604020202020204" pitchFamily="34" charset="0"/>
-              <a:buChar char="•"/>
-            </a:pPr>
-            <a:r>
-              <a:rPr lang="en-US" sz="1800" dirty="0"/>
-              <a:t>Indian Kanoon scraper: 50,000 Supreme Court and High Court judgments</a:t>
-            </a:r>
-          </a:p>
-          <a:p>
-            <a:pPr marL="342900" indent="-342900">
-              <a:buFont typeface="Arial" panose="020B0604020202020204" pitchFamily="34" charset="0"/>
-              <a:buChar char="•"/>
-            </a:pPr>
-            <a:r>
-              <a:rPr lang="en-IN" sz="1800" dirty="0"/>
-              <a:t>Legal-domain chunking</a:t>
-            </a:r>
-          </a:p>
-          <a:p>
-            <a:pPr marL="342900" indent="-342900">
-              <a:buFont typeface="Arial" panose="020B0604020202020204" pitchFamily="34" charset="0"/>
-              <a:buChar char="•"/>
-            </a:pPr>
-            <a:r>
-              <a:rPr lang="en-IN" sz="1800" dirty="0"/>
-              <a:t>Hybrid retrieval</a:t>
-            </a:r>
-          </a:p>
-          <a:p>
-            <a:pPr marL="342900" indent="-342900">
-              <a:buFont typeface="Arial" panose="020B0604020202020204" pitchFamily="34" charset="0"/>
-              <a:buChar char="•"/>
-            </a:pPr>
-            <a:r>
-              <a:rPr lang="en-IN" sz="1800" dirty="0"/>
-              <a:t>Holding summariser</a:t>
-            </a:r>
-          </a:p>
-          <a:p>
-            <a:pPr marL="342900" indent="-342900">
-              <a:buFont typeface="Arial" panose="020B0604020202020204" pitchFamily="34" charset="0"/>
-              <a:buChar char="•"/>
-            </a:pPr>
-            <a:r>
-              <a:rPr lang="en-US" sz="1800" dirty="0"/>
-              <a:t>Argument outline drafter: pro and contra positions with supporting precedent citations</a:t>
-            </a:r>
-          </a:p>
-          <a:p>
-            <a:pPr marL="342900" indent="-342900">
-              <a:buFont typeface="Arial" panose="020B0604020202020204" pitchFamily="34" charset="0"/>
-              <a:buChar char="•"/>
-            </a:pPr>
-            <a:r>
-              <a:rPr lang="en-US" sz="1800" dirty="0"/>
-              <a:t>Case upload: advocate uploads client case file for session-specific contextual retrieval</a:t>
-            </a:r>
-            <a:endParaRPr lang="en-IN" sz="1800" dirty="0"/>
-          </a:p>
-        </p:txBody>
-      </p:sp>
-    </p:spTree>
-    <p:extLst>
-      <p:ext uri="{BB962C8B-B14F-4D97-AF65-F5344CB8AC3E}">
-        <p14:creationId xmlns:p14="http://schemas.microsoft.com/office/powerpoint/2010/main" val="3162752367"/>
-      </p:ext>
-    </p:extLst>
-  </p:cSld>
-  <p:clrMapOvr>
-    <a:masterClrMapping/>
-  </p:clrMapOvr>
-</p:sld>
-</file>
-
-<file path=ppt/slides/slide5.xml><?xml version="1.0" encoding="utf-8"?>
-<p:sld xmlns:a="http://schemas.openxmlformats.org/drawingml/2006/main" xmlns:r="http://schemas.openxmlformats.org/officeDocument/2006/relationships" xmlns:p="http://schemas.openxmlformats.org/presentationml/2006/main">
-  <p:cSld>
-    <p:spTree>
-      <p:nvGrpSpPr>
-        <p:cNvPr id="1" name=""/>
-        <p:cNvGrpSpPr/>
-        <p:nvPr/>
-      </p:nvGrpSpPr>
-      <p:grpSpPr>
-        <a:xfrm>
-          <a:off x="0" y="0"/>
-          <a:ext cx="0" cy="0"/>
-          <a:chOff x="0" y="0"/>
-          <a:chExt cx="0" cy="0"/>
-        </a:xfrm>
-      </p:grpSpPr>
-      <p:sp>
-        <p:nvSpPr>
-          <p:cNvPr id="2" name="Title 1">
+              <a:rPr lang="en-US" sz="1500" b="1" dirty="0"/>
+              <a:t>Datasets</a:t>
+            </a:r>
+            <a:endParaRPr lang="en-US" sz="2400" b="1" dirty="0"/>
+          </a:p>
+          <a:p>
+            <a:r>
+              <a:rPr lang="en-US" sz="1200" dirty="0"/>
+              <a:t>Due to r</a:t>
+            </a:r>
+            <a:r>
+              <a:rPr lang="en-IN" sz="1200" dirty="0" err="1"/>
+              <a:t>eal</a:t>
+            </a:r>
+            <a:r>
+              <a:rPr lang="en-IN" sz="1200" dirty="0"/>
+              <a:t> banking conversations contain sensitive financial and personally identifiable information. Instead, we can create a synthetic banking customer-support dataset.</a:t>
+            </a:r>
+          </a:p>
+        </p:txBody>
+      </p:sp>
+      <p:sp>
+        <p:nvSpPr>
+          <p:cNvPr id="6" name="Content Placeholder 2">
             <a:extLst>
               <a:ext uri="{FF2B5EF4-FFF2-40B4-BE49-F238E27FC236}">
-                <a16:creationId xmlns:a16="http://schemas.microsoft.com/office/drawing/2014/main" id="{008EC106-2771-8066-4DD9-49DA5E5A541D}"/>
-              </a:ext>
-            </a:extLst>
-          </p:cNvPr>
-          <p:cNvSpPr>
-            <a:spLocks noGrp="1"/>
-          </p:cNvSpPr>
-          <p:nvPr>
-            <p:ph type="title"/>
-          </p:nvPr>
-        </p:nvSpPr>
-        <p:spPr/>
-        <p:txBody>
-          <a:bodyPr/>
-          <a:lstStyle/>
-          <a:p>
-            <a:r>
-              <a:rPr lang="en-US" dirty="0"/>
-              <a:t>Dataset</a:t>
-            </a:r>
-            <a:endParaRPr lang="en-IN" dirty="0"/>
-          </a:p>
-        </p:txBody>
-      </p:sp>
-      <p:sp>
-        <p:nvSpPr>
-          <p:cNvPr id="3" name="Content Placeholder 2">
-            <a:extLst>
-              <a:ext uri="{FF2B5EF4-FFF2-40B4-BE49-F238E27FC236}">
-                <a16:creationId xmlns:a16="http://schemas.microsoft.com/office/drawing/2014/main" id="{90066223-E67F-DE1F-A9AA-FB1F9E4E7066}"/>
-              </a:ext>
-            </a:extLst>
-          </p:cNvPr>
-          <p:cNvSpPr>
-            <a:spLocks noGrp="1"/>
-          </p:cNvSpPr>
-          <p:nvPr>
-            <p:ph idx="1"/>
-          </p:nvPr>
-        </p:nvSpPr>
-        <p:spPr>
-          <a:xfrm>
-            <a:off x="3869268" y="864109"/>
-            <a:ext cx="7315200" cy="1684220"/>
-          </a:xfrm>
-        </p:spPr>
-        <p:txBody>
-          <a:bodyPr>
-            <a:normAutofit fontScale="92500"/>
-          </a:bodyPr>
-          <a:lstStyle/>
-          <a:p>
-            <a:pPr marL="0" indent="0">
-              <a:buNone/>
-            </a:pPr>
-            <a:r>
-              <a:rPr lang="en-US" sz="2400" b="1" dirty="0"/>
-              <a:t>Project 1</a:t>
-            </a:r>
-          </a:p>
-          <a:p>
-            <a:r>
-              <a:rPr lang="en-US" sz="2400" dirty="0"/>
-              <a:t>Due to r</a:t>
-            </a:r>
-            <a:r>
-              <a:rPr lang="en-IN" sz="2400" dirty="0" err="1"/>
-              <a:t>eal</a:t>
-            </a:r>
-            <a:r>
-              <a:rPr lang="en-IN" sz="2400" dirty="0"/>
-              <a:t> banking conversations contain sensitive financial and personally identifiable information. Instead, we can create a synthetic banking customer-support dataset.</a:t>
-            </a:r>
-          </a:p>
-        </p:txBody>
-      </p:sp>
-      <p:sp>
-        <p:nvSpPr>
-          <p:cNvPr id="4" name="Content Placeholder 2">
-            <a:extLst>
-              <a:ext uri="{FF2B5EF4-FFF2-40B4-BE49-F238E27FC236}">
-                <a16:creationId xmlns:a16="http://schemas.microsoft.com/office/drawing/2014/main" id="{D720A3BF-9DB9-F45C-40FC-8B02F8984565}"/>
+                <a16:creationId xmlns:a16="http://schemas.microsoft.com/office/drawing/2014/main" id="{5CB16808-4A7D-69AA-1B9D-01893F493173}"/>
               </a:ext>
             </a:extLst>
           </p:cNvPr>
@@ -5196,7 +4756,7 @@
         </p:nvSpPr>
         <p:spPr>
           <a:xfrm>
-            <a:off x="3869268" y="3467562"/>
+            <a:off x="3869268" y="4405684"/>
             <a:ext cx="7315200" cy="1684220"/>
           </a:xfrm>
           <a:prstGeom prst="rect">
@@ -5205,7 +4765,7 @@
         </p:spPr>
         <p:txBody>
           <a:bodyPr vert="horz" lIns="91440" tIns="45720" rIns="91440" bIns="45720" rtlCol="0" anchor="ctr">
-            <a:normAutofit fontScale="92500" lnSpcReduction="10000"/>
+            <a:noAutofit/>
           </a:bodyPr>
           <a:lstStyle>
             <a:lvl1pPr marL="182880" indent="-182880" algn="l" defTabSz="914400" rtl="0" eaLnBrk="1" latinLnBrk="0" hangingPunct="1">
@@ -5450,26 +5010,63 @@
             </a:lvl9pPr>
           </a:lstStyle>
           <a:p>
-            <a:r>
-              <a:rPr lang="en-US" sz="2400" b="1" dirty="0"/>
-              <a:t>Project 2</a:t>
-            </a:r>
-          </a:p>
-          <a:p>
-            <a:r>
-              <a:rPr lang="en-US" sz="2400" dirty="0"/>
-              <a:t>Open India Law- Hugging Face Dataset is to be used for the project. It contains judgments from the Supreme Court and all 25 High Courts of India. The current corpus has more than 12.8 million court judgments, covering roughly 1950–2025.</a:t>
-            </a:r>
-          </a:p>
-          <a:p>
-            <a:endParaRPr lang="en-IN" sz="2400" dirty="0"/>
+            <a:pPr marL="0" indent="0">
+              <a:buNone/>
+            </a:pPr>
+            <a:r>
+              <a:rPr lang="en-US" sz="1800" b="1" dirty="0"/>
+              <a:t>Objective</a:t>
+            </a:r>
+            <a:endParaRPr lang="en-US" sz="1400" b="1" dirty="0"/>
+          </a:p>
+          <a:p>
+            <a:r>
+              <a:rPr lang="en-US" sz="1200" dirty="0"/>
+              <a:t>End-to-end voice pipeline: browser mic or Asterisk to faster-whisper STT to intent detection to RAG to Coqui TTS.</a:t>
+            </a:r>
+          </a:p>
+          <a:p>
+            <a:r>
+              <a:rPr lang="en-US" sz="1200" dirty="0"/>
+              <a:t>RAG knowledge base over bank FAQ PDFs, policy documents, and product sheets.</a:t>
+            </a:r>
+          </a:p>
+          <a:p>
+            <a:r>
+              <a:rPr lang="en-US" sz="1200" dirty="0"/>
+              <a:t>Intent classifier for banking: balance, card block, EMI, NEFT, cheque, FD, and more.</a:t>
+            </a:r>
+          </a:p>
+          <a:p>
+            <a:r>
+              <a:rPr lang="en-IN" sz="1200" dirty="0"/>
+              <a:t>Seamless human escalation</a:t>
+            </a:r>
+          </a:p>
+          <a:p>
+            <a:r>
+              <a:rPr lang="en-US" sz="1200" dirty="0"/>
+              <a:t>Call analytics dashboard: intent distribution, resolution rate, and average handle time</a:t>
+            </a:r>
+          </a:p>
+          <a:p>
+            <a:r>
+              <a:rPr lang="en-US" sz="1200" dirty="0"/>
+              <a:t>DTMF keypad fallback for low-network conditions</a:t>
+            </a:r>
+          </a:p>
+          <a:p>
+            <a:r>
+              <a:rPr lang="en-US" sz="1200" dirty="0"/>
+              <a:t>WebSocket-based deployment with Redis session management</a:t>
+            </a:r>
           </a:p>
         </p:txBody>
       </p:sp>
     </p:spTree>
     <p:extLst>
       <p:ext uri="{BB962C8B-B14F-4D97-AF65-F5344CB8AC3E}">
-        <p14:creationId xmlns:p14="http://schemas.microsoft.com/office/powerpoint/2010/main" val="4292092617"/>
+        <p14:creationId xmlns:p14="http://schemas.microsoft.com/office/powerpoint/2010/main" val="1841511052"/>
       </p:ext>
     </p:extLst>
   </p:cSld>
@@ -5479,7 +5076,464 @@
 </p:sld>
 </file>
 
-<file path=ppt/slides/slide6.xml><?xml version="1.0" encoding="utf-8"?>
+<file path=ppt/slides/slide3.xml><?xml version="1.0" encoding="utf-8"?>
+<p:sld xmlns:a="http://schemas.openxmlformats.org/drawingml/2006/main" xmlns:r="http://schemas.openxmlformats.org/officeDocument/2006/relationships" xmlns:p="http://schemas.openxmlformats.org/presentationml/2006/main">
+  <p:cSld>
+    <p:bg>
+      <p:bgPr>
+        <a:solidFill>
+          <a:schemeClr val="bg1"/>
+        </a:solidFill>
+        <a:effectLst/>
+      </p:bgPr>
+    </p:bg>
+    <p:spTree>
+      <p:nvGrpSpPr>
+        <p:cNvPr id="1" name="">
+          <a:extLst>
+            <a:ext uri="{FF2B5EF4-FFF2-40B4-BE49-F238E27FC236}">
+              <a16:creationId xmlns:a16="http://schemas.microsoft.com/office/drawing/2014/main" id="{E29EC01C-3510-F8D2-6A7C-E2B95FA0E83C}"/>
+            </a:ext>
+          </a:extLst>
+        </p:cNvPr>
+        <p:cNvGrpSpPr/>
+        <p:nvPr/>
+      </p:nvGrpSpPr>
+      <p:grpSpPr>
+        <a:xfrm>
+          <a:off x="0" y="0"/>
+          <a:ext cx="0" cy="0"/>
+          <a:chOff x="0" y="0"/>
+          <a:chExt cx="0" cy="0"/>
+        </a:xfrm>
+      </p:grpSpPr>
+      <p:sp useBgFill="1">
+        <p:nvSpPr>
+          <p:cNvPr id="9" name="Rectangle 8">
+            <a:extLst>
+              <a:ext uri="{FF2B5EF4-FFF2-40B4-BE49-F238E27FC236}">
+                <a16:creationId xmlns:a16="http://schemas.microsoft.com/office/drawing/2014/main" id="{6A599269-A4F5-BC0D-AE57-C8573215EB00}"/>
+              </a:ext>
+              <a:ext uri="{C183D7F6-B498-43B3-948B-1728B52AA6E4}">
+                <adec:decorative xmlns:adec="http://schemas.microsoft.com/office/drawing/2017/decorative" val="1"/>
+              </a:ext>
+            </a:extLst>
+          </p:cNvPr>
+          <p:cNvSpPr>
+            <a:spLocks noGrp="1" noRot="1" noChangeAspect="1" noMove="1" noResize="1" noEditPoints="1" noAdjustHandles="1" noChangeArrowheads="1" noChangeShapeType="1" noTextEdit="1"/>
+          </p:cNvSpPr>
+          <p:nvPr>
+            <p:extLst>
+              <p:ext uri="{386F3935-93C4-4BCD-93E2-E3B085C9AB24}">
+                <p16:designElem xmlns:p16="http://schemas.microsoft.com/office/powerpoint/2015/main" val="1"/>
+              </p:ext>
+            </p:extLst>
+          </p:nvPr>
+        </p:nvSpPr>
+        <p:spPr>
+          <a:xfrm>
+            <a:off x="0" y="0"/>
+            <a:ext cx="12192000" cy="6858000"/>
+          </a:xfrm>
+          <a:prstGeom prst="rect">
+            <a:avLst/>
+          </a:prstGeom>
+          <a:ln>
+            <a:noFill/>
+          </a:ln>
+        </p:spPr>
+        <p:style>
+          <a:lnRef idx="2">
+            <a:schemeClr val="accent1">
+              <a:shade val="50000"/>
+            </a:schemeClr>
+          </a:lnRef>
+          <a:fillRef idx="1">
+            <a:schemeClr val="accent1"/>
+          </a:fillRef>
+          <a:effectRef idx="0">
+            <a:schemeClr val="accent1"/>
+          </a:effectRef>
+          <a:fontRef idx="minor">
+            <a:schemeClr val="lt1"/>
+          </a:fontRef>
+        </p:style>
+        <p:txBody>
+          <a:bodyPr rtlCol="0" anchor="ctr"/>
+          <a:lstStyle/>
+          <a:p>
+            <a:pPr algn="ctr"/>
+            <a:endParaRPr lang="en-US"/>
+          </a:p>
+        </p:txBody>
+      </p:sp>
+      <p:pic>
+        <p:nvPicPr>
+          <p:cNvPr id="5" name="Picture 4" descr="Angled shot of pen on a graph">
+            <a:extLst>
+              <a:ext uri="{FF2B5EF4-FFF2-40B4-BE49-F238E27FC236}">
+                <a16:creationId xmlns:a16="http://schemas.microsoft.com/office/drawing/2014/main" id="{27E30C1F-7686-CBA5-48ED-8E0E76924ED5}"/>
+              </a:ext>
+            </a:extLst>
+          </p:cNvPr>
+          <p:cNvPicPr>
+            <a:picLocks noChangeAspect="1"/>
+          </p:cNvPicPr>
+          <p:nvPr/>
+        </p:nvPicPr>
+        <p:blipFill>
+          <a:blip r:embed="rId2">
+            <a:duotone>
+              <a:schemeClr val="bg2">
+                <a:shade val="45000"/>
+                <a:satMod val="135000"/>
+              </a:schemeClr>
+              <a:prstClr val="white"/>
+            </a:duotone>
+            <a:alphaModFix amt="25000"/>
+          </a:blip>
+          <a:srcRect t="9487" r="-1" b="6222"/>
+          <a:stretch>
+            <a:fillRect/>
+          </a:stretch>
+        </p:blipFill>
+        <p:spPr>
+          <a:xfrm>
+            <a:off x="20" y="1"/>
+            <a:ext cx="12188932" cy="6858000"/>
+          </a:xfrm>
+          <a:prstGeom prst="rect">
+            <a:avLst/>
+          </a:prstGeom>
+        </p:spPr>
+      </p:pic>
+      <p:sp>
+        <p:nvSpPr>
+          <p:cNvPr id="11" name="Rectangle 10">
+            <a:extLst>
+              <a:ext uri="{FF2B5EF4-FFF2-40B4-BE49-F238E27FC236}">
+                <a16:creationId xmlns:a16="http://schemas.microsoft.com/office/drawing/2014/main" id="{AB0AF305-7852-CE24-4C18-6D126033C9CE}"/>
+              </a:ext>
+              <a:ext uri="{C183D7F6-B498-43B3-948B-1728B52AA6E4}">
+                <adec:decorative xmlns:adec="http://schemas.microsoft.com/office/drawing/2017/decorative" val="1"/>
+              </a:ext>
+            </a:extLst>
+          </p:cNvPr>
+          <p:cNvSpPr>
+            <a:spLocks noGrp="1" noRot="1" noChangeAspect="1" noMove="1" noResize="1" noEditPoints="1" noAdjustHandles="1" noChangeArrowheads="1" noChangeShapeType="1" noTextEdit="1"/>
+          </p:cNvSpPr>
+          <p:nvPr>
+            <p:extLst>
+              <p:ext uri="{386F3935-93C4-4BCD-93E2-E3B085C9AB24}">
+                <p16:designElem xmlns:p16="http://schemas.microsoft.com/office/powerpoint/2015/main" val="1"/>
+              </p:ext>
+            </p:extLst>
+          </p:nvPr>
+        </p:nvSpPr>
+        <p:spPr>
+          <a:xfrm>
+            <a:off x="1" y="758952"/>
+            <a:ext cx="3443590" cy="5330952"/>
+          </a:xfrm>
+          <a:prstGeom prst="rect">
+            <a:avLst/>
+          </a:prstGeom>
+          <a:solidFill>
+            <a:schemeClr val="accent1"/>
+          </a:solidFill>
+          <a:ln>
+            <a:noFill/>
+          </a:ln>
+        </p:spPr>
+        <p:style>
+          <a:lnRef idx="2">
+            <a:schemeClr val="accent1">
+              <a:shade val="50000"/>
+            </a:schemeClr>
+          </a:lnRef>
+          <a:fillRef idx="1">
+            <a:schemeClr val="accent1"/>
+          </a:fillRef>
+          <a:effectRef idx="0">
+            <a:schemeClr val="accent1"/>
+          </a:effectRef>
+          <a:fontRef idx="minor">
+            <a:schemeClr val="lt1"/>
+          </a:fontRef>
+        </p:style>
+        <p:txBody>
+          <a:bodyPr/>
+          <a:lstStyle/>
+          <a:p>
+            <a:endParaRPr lang="en-IN"/>
+          </a:p>
+        </p:txBody>
+      </p:sp>
+      <p:sp>
+        <p:nvSpPr>
+          <p:cNvPr id="2" name="Title 1">
+            <a:extLst>
+              <a:ext uri="{FF2B5EF4-FFF2-40B4-BE49-F238E27FC236}">
+                <a16:creationId xmlns:a16="http://schemas.microsoft.com/office/drawing/2014/main" id="{718C0042-5497-A7A6-B678-3CAB52EF0876}"/>
+              </a:ext>
+            </a:extLst>
+          </p:cNvPr>
+          <p:cNvSpPr>
+            <a:spLocks noGrp="1"/>
+          </p:cNvSpPr>
+          <p:nvPr>
+            <p:ph type="title"/>
+          </p:nvPr>
+        </p:nvSpPr>
+        <p:spPr>
+          <a:xfrm>
+            <a:off x="252919" y="1123837"/>
+            <a:ext cx="2947482" cy="4601183"/>
+          </a:xfrm>
+        </p:spPr>
+        <p:txBody>
+          <a:bodyPr>
+            <a:normAutofit/>
+          </a:bodyPr>
+          <a:lstStyle/>
+          <a:p>
+            <a:r>
+              <a:rPr lang="en-GB" dirty="0"/>
+              <a:t>Legal Research Assistant for Indian Courts</a:t>
+            </a:r>
+            <a:endParaRPr lang="en-IN" dirty="0"/>
+          </a:p>
+        </p:txBody>
+      </p:sp>
+      <p:sp>
+        <p:nvSpPr>
+          <p:cNvPr id="3" name="Content Placeholder 2">
+            <a:extLst>
+              <a:ext uri="{FF2B5EF4-FFF2-40B4-BE49-F238E27FC236}">
+                <a16:creationId xmlns:a16="http://schemas.microsoft.com/office/drawing/2014/main" id="{8A3CD164-0C74-1A02-9AD9-EC87B0CE0E53}"/>
+              </a:ext>
+            </a:extLst>
+          </p:cNvPr>
+          <p:cNvSpPr>
+            <a:spLocks noGrp="1"/>
+          </p:cNvSpPr>
+          <p:nvPr>
+            <p:ph idx="1"/>
+          </p:nvPr>
+        </p:nvSpPr>
+        <p:spPr>
+          <a:xfrm>
+            <a:off x="3869268" y="329783"/>
+            <a:ext cx="7315200" cy="6205927"/>
+          </a:xfrm>
+        </p:spPr>
+        <p:txBody>
+          <a:bodyPr>
+            <a:normAutofit/>
+          </a:bodyPr>
+          <a:lstStyle/>
+          <a:p>
+            <a:pPr marL="0" indent="0">
+              <a:buNone/>
+            </a:pPr>
+            <a:r>
+              <a:rPr lang="en-US" sz="1400" b="1" dirty="0"/>
+              <a:t>Problem Statement</a:t>
+            </a:r>
+            <a:endParaRPr lang="en-US" sz="1100" b="1" dirty="0"/>
+          </a:p>
+          <a:p>
+            <a:r>
+              <a:rPr lang="en-US" sz="1100" dirty="0"/>
+              <a:t>Junior advocates spend weeks searching thousands of Supreme Court and High Court judgments on rulings to find relevant precedents, which is a slow and incomplete process. Senior lawyer time for research costs between 2,000 and 10,000 rupees per hour, making thorough legal research economically inaccessible for small firms.</a:t>
+            </a:r>
+          </a:p>
+          <a:p>
+            <a:endParaRPr lang="en-US" sz="1100" dirty="0"/>
+          </a:p>
+          <a:p>
+            <a:pPr marL="0" indent="0">
+              <a:buNone/>
+            </a:pPr>
+            <a:r>
+              <a:rPr lang="en-US" sz="1400" b="1" dirty="0"/>
+              <a:t>Solution Overview</a:t>
+            </a:r>
+            <a:endParaRPr lang="en-US" sz="1100" b="1" dirty="0"/>
+          </a:p>
+          <a:p>
+            <a:r>
+              <a:rPr lang="en-US" sz="1100" dirty="0"/>
+              <a:t>A RAG application over the Indian Kanoon corpus and uploaded case files using legal-domain embeddings, two-stage hybrid retrieval, and LLM-based holding extraction, enabling advocates to find relevant precedents, extract ratio decidendi, and auto-draft structured argument outlines with citation-linked evidence.</a:t>
+            </a:r>
+            <a:endParaRPr lang="en-IN" sz="1100" dirty="0"/>
+          </a:p>
+          <a:p>
+            <a:pPr marL="0" indent="0">
+              <a:buNone/>
+            </a:pPr>
+            <a:r>
+              <a:rPr lang="en-US" sz="1400" b="1" dirty="0"/>
+              <a:t>Dataset</a:t>
+            </a:r>
+          </a:p>
+          <a:p>
+            <a:r>
+              <a:rPr lang="en-US" sz="1100" dirty="0"/>
+              <a:t>Open India Law- Hugging Face Dataset is to be used for the project. It contains judgments from the Supreme Court and all 25 High Courts of India. The current corpus has more than 12.8 million court judgments, covering roughly 1950–2025.</a:t>
+            </a:r>
+          </a:p>
+          <a:p>
+            <a:pPr marL="0" indent="0">
+              <a:buNone/>
+            </a:pPr>
+            <a:r>
+              <a:rPr lang="en-US" sz="1400" b="1" dirty="0"/>
+              <a:t>Objective</a:t>
+            </a:r>
+            <a:endParaRPr lang="en-US" sz="1100" b="1" dirty="0"/>
+          </a:p>
+          <a:p>
+            <a:pPr marL="342900" indent="-342900">
+              <a:buFont typeface="Arial" panose="020B0604020202020204" pitchFamily="34" charset="0"/>
+              <a:buChar char="•"/>
+            </a:pPr>
+            <a:r>
+              <a:rPr lang="en-US" sz="1100" dirty="0"/>
+              <a:t>Indian Kanoon scraper: 50,000 Supreme Court and High Court judgments</a:t>
+            </a:r>
+          </a:p>
+          <a:p>
+            <a:pPr marL="342900" indent="-342900">
+              <a:buFont typeface="Arial" panose="020B0604020202020204" pitchFamily="34" charset="0"/>
+              <a:buChar char="•"/>
+            </a:pPr>
+            <a:r>
+              <a:rPr lang="en-IN" sz="1100" dirty="0"/>
+              <a:t>Legal-domain chunking</a:t>
+            </a:r>
+          </a:p>
+          <a:p>
+            <a:pPr marL="342900" indent="-342900">
+              <a:buFont typeface="Arial" panose="020B0604020202020204" pitchFamily="34" charset="0"/>
+              <a:buChar char="•"/>
+            </a:pPr>
+            <a:r>
+              <a:rPr lang="en-IN" sz="1100" dirty="0"/>
+              <a:t>Hybrid retrieval</a:t>
+            </a:r>
+          </a:p>
+          <a:p>
+            <a:pPr marL="342900" indent="-342900">
+              <a:buFont typeface="Arial" panose="020B0604020202020204" pitchFamily="34" charset="0"/>
+              <a:buChar char="•"/>
+            </a:pPr>
+            <a:r>
+              <a:rPr lang="en-IN" sz="1100" dirty="0"/>
+              <a:t>Holding summariser</a:t>
+            </a:r>
+          </a:p>
+          <a:p>
+            <a:pPr marL="342900" indent="-342900">
+              <a:buFont typeface="Arial" panose="020B0604020202020204" pitchFamily="34" charset="0"/>
+              <a:buChar char="•"/>
+            </a:pPr>
+            <a:r>
+              <a:rPr lang="en-US" sz="1100" dirty="0"/>
+              <a:t>Argument outline drafter: pro and contra positions with supporting precedent citations</a:t>
+            </a:r>
+          </a:p>
+          <a:p>
+            <a:pPr marL="342900" indent="-342900">
+              <a:buFont typeface="Arial" panose="020B0604020202020204" pitchFamily="34" charset="0"/>
+              <a:buChar char="•"/>
+            </a:pPr>
+            <a:r>
+              <a:rPr lang="en-US" sz="1100" dirty="0"/>
+              <a:t>Case upload: advocate uploads client case file for session-specific contextual retrieval</a:t>
+            </a:r>
+            <a:endParaRPr lang="en-IN" sz="1100" dirty="0"/>
+          </a:p>
+        </p:txBody>
+      </p:sp>
+      <p:sp>
+        <p:nvSpPr>
+          <p:cNvPr id="13" name="Rectangle 12">
+            <a:extLst>
+              <a:ext uri="{FF2B5EF4-FFF2-40B4-BE49-F238E27FC236}">
+                <a16:creationId xmlns:a16="http://schemas.microsoft.com/office/drawing/2014/main" id="{B687392A-F4C1-C75C-41D3-7D97214BC791}"/>
+              </a:ext>
+              <a:ext uri="{C183D7F6-B498-43B3-948B-1728B52AA6E4}">
+                <adec:decorative xmlns:adec="http://schemas.microsoft.com/office/drawing/2017/decorative" val="1"/>
+              </a:ext>
+            </a:extLst>
+          </p:cNvPr>
+          <p:cNvSpPr>
+            <a:spLocks noGrp="1" noRot="1" noChangeAspect="1" noMove="1" noResize="1" noEditPoints="1" noAdjustHandles="1" noChangeArrowheads="1" noChangeShapeType="1" noTextEdit="1"/>
+          </p:cNvSpPr>
+          <p:nvPr>
+            <p:extLst>
+              <p:ext uri="{386F3935-93C4-4BCD-93E2-E3B085C9AB24}">
+                <p16:designElem xmlns:p16="http://schemas.microsoft.com/office/powerpoint/2015/main" val="1"/>
+              </p:ext>
+            </p:extLst>
+          </p:nvPr>
+        </p:nvSpPr>
+        <p:spPr>
+          <a:xfrm>
+            <a:off x="11815864" y="758952"/>
+            <a:ext cx="384048" cy="5330952"/>
+          </a:xfrm>
+          <a:prstGeom prst="rect">
+            <a:avLst/>
+          </a:prstGeom>
+          <a:solidFill>
+            <a:srgbClr val="C8C8C8">
+              <a:alpha val="49804"/>
+            </a:srgbClr>
+          </a:solidFill>
+          <a:ln>
+            <a:noFill/>
+          </a:ln>
+        </p:spPr>
+        <p:style>
+          <a:lnRef idx="2">
+            <a:schemeClr val="accent1">
+              <a:shade val="50000"/>
+            </a:schemeClr>
+          </a:lnRef>
+          <a:fillRef idx="1">
+            <a:schemeClr val="accent1"/>
+          </a:fillRef>
+          <a:effectRef idx="0">
+            <a:schemeClr val="accent1"/>
+          </a:effectRef>
+          <a:fontRef idx="minor">
+            <a:schemeClr val="lt1"/>
+          </a:fontRef>
+        </p:style>
+        <p:txBody>
+          <a:bodyPr/>
+          <a:lstStyle/>
+          <a:p>
+            <a:endParaRPr lang="en-IN"/>
+          </a:p>
+        </p:txBody>
+      </p:sp>
+    </p:spTree>
+    <p:extLst>
+      <p:ext uri="{BB962C8B-B14F-4D97-AF65-F5344CB8AC3E}">
+        <p14:creationId xmlns:p14="http://schemas.microsoft.com/office/powerpoint/2010/main" val="2783316911"/>
+      </p:ext>
+    </p:extLst>
+  </p:cSld>
+  <p:clrMapOvr>
+    <a:masterClrMapping/>
+  </p:clrMapOvr>
+</p:sld>
+</file>
+
+<file path=ppt/slides/slide4.xml><?xml version="1.0" encoding="utf-8"?>
 <p:sld xmlns:a="http://schemas.openxmlformats.org/drawingml/2006/main" xmlns:r="http://schemas.openxmlformats.org/officeDocument/2006/relationships" xmlns:p="http://schemas.openxmlformats.org/presentationml/2006/main">
   <p:cSld>
     <p:spTree>
@@ -5958,7 +6012,7 @@
 </p:sld>
 </file>
 
-<file path=ppt/slides/slide7.xml><?xml version="1.0" encoding="utf-8"?>
+<file path=ppt/slides/slide5.xml><?xml version="1.0" encoding="utf-8"?>
 <p:sld xmlns:a="http://schemas.openxmlformats.org/drawingml/2006/main" xmlns:r="http://schemas.openxmlformats.org/officeDocument/2006/relationships" xmlns:p="http://schemas.openxmlformats.org/presentationml/2006/main">
   <p:cSld>
     <p:spTree>
@@ -6504,7 +6558,7 @@
 </p:sld>
 </file>
 
-<file path=ppt/slides/slide8.xml><?xml version="1.0" encoding="utf-8"?>
+<file path=ppt/slides/slide6.xml><?xml version="1.0" encoding="utf-8"?>
 <p:sld xmlns:a="http://schemas.openxmlformats.org/drawingml/2006/main" xmlns:r="http://schemas.openxmlformats.org/officeDocument/2006/relationships" xmlns:p="http://schemas.openxmlformats.org/presentationml/2006/main">
   <p:cSld>
     <p:spTree>
@@ -6681,7 +6735,7 @@
 </p:sld>
 </file>
 
-<file path=ppt/slides/slide9.xml><?xml version="1.0" encoding="utf-8"?>
+<file path=ppt/slides/slide7.xml><?xml version="1.0" encoding="utf-8"?>
 <p:sld xmlns:a="http://schemas.openxmlformats.org/drawingml/2006/main" xmlns:r="http://schemas.openxmlformats.org/officeDocument/2006/relationships" xmlns:p="http://schemas.openxmlformats.org/presentationml/2006/main">
   <p:cSld>
     <p:spTree>
@@ -6813,6 +6867,306 @@
     <p:extLst>
       <p:ext uri="{BB962C8B-B14F-4D97-AF65-F5344CB8AC3E}">
         <p14:creationId xmlns:p14="http://schemas.microsoft.com/office/powerpoint/2010/main" val="3581882527"/>
+      </p:ext>
+    </p:extLst>
+  </p:cSld>
+  <p:clrMapOvr>
+    <a:masterClrMapping/>
+  </p:clrMapOvr>
+</p:sld>
+</file>
+
+<file path=ppt/slides/slide8.xml><?xml version="1.0" encoding="utf-8"?>
+<p:sld xmlns:a="http://schemas.openxmlformats.org/drawingml/2006/main" xmlns:r="http://schemas.openxmlformats.org/officeDocument/2006/relationships" xmlns:p="http://schemas.openxmlformats.org/presentationml/2006/main">
+  <p:cSld>
+    <p:spTree>
+      <p:nvGrpSpPr>
+        <p:cNvPr id="1" name="">
+          <a:extLst>
+            <a:ext uri="{FF2B5EF4-FFF2-40B4-BE49-F238E27FC236}">
+              <a16:creationId xmlns:a16="http://schemas.microsoft.com/office/drawing/2014/main" id="{A4EF664E-6C7F-ED31-C5F2-AC6154D413CF}"/>
+            </a:ext>
+          </a:extLst>
+        </p:cNvPr>
+        <p:cNvGrpSpPr/>
+        <p:nvPr/>
+      </p:nvGrpSpPr>
+      <p:grpSpPr>
+        <a:xfrm>
+          <a:off x="0" y="0"/>
+          <a:ext cx="0" cy="0"/>
+          <a:chOff x="0" y="0"/>
+          <a:chExt cx="0" cy="0"/>
+        </a:xfrm>
+      </p:grpSpPr>
+      <p:sp>
+        <p:nvSpPr>
+          <p:cNvPr id="2" name="Title 1">
+            <a:extLst>
+              <a:ext uri="{FF2B5EF4-FFF2-40B4-BE49-F238E27FC236}">
+                <a16:creationId xmlns:a16="http://schemas.microsoft.com/office/drawing/2014/main" id="{6EE74CBD-3BCE-AB1C-B7A0-55AF34786CB8}"/>
+              </a:ext>
+            </a:extLst>
+          </p:cNvPr>
+          <p:cNvSpPr>
+            <a:spLocks noGrp="1"/>
+          </p:cNvSpPr>
+          <p:nvPr>
+            <p:ph type="title"/>
+          </p:nvPr>
+        </p:nvSpPr>
+        <p:spPr/>
+        <p:txBody>
+          <a:bodyPr/>
+          <a:lstStyle/>
+          <a:p>
+            <a:endParaRPr lang="en-IN"/>
+          </a:p>
+        </p:txBody>
+      </p:sp>
+      <p:sp>
+        <p:nvSpPr>
+          <p:cNvPr id="3" name="Content Placeholder 2">
+            <a:extLst>
+              <a:ext uri="{FF2B5EF4-FFF2-40B4-BE49-F238E27FC236}">
+                <a16:creationId xmlns:a16="http://schemas.microsoft.com/office/drawing/2014/main" id="{85BBED03-0DBC-E411-C1AF-CE18EC85272F}"/>
+              </a:ext>
+            </a:extLst>
+          </p:cNvPr>
+          <p:cNvSpPr>
+            <a:spLocks noGrp="1"/>
+          </p:cNvSpPr>
+          <p:nvPr>
+            <p:ph idx="1"/>
+          </p:nvPr>
+        </p:nvSpPr>
+        <p:spPr/>
+        <p:txBody>
+          <a:bodyPr>
+            <a:normAutofit/>
+          </a:bodyPr>
+          <a:lstStyle/>
+          <a:p>
+            <a:r>
+              <a:rPr lang="en-IN" dirty="0"/>
+              <a:t>Anand, L. G. (2025). From Voice to Value: The Expanding Role of AI in Communication and Financial Services.</a:t>
+            </a:r>
+          </a:p>
+          <a:p>
+            <a:r>
+              <a:rPr lang="en-IN" dirty="0" err="1"/>
+              <a:t>Chitraju</a:t>
+            </a:r>
+            <a:r>
+              <a:rPr lang="en-IN" dirty="0"/>
+              <a:t>, S. (2025). Smart Systems, Smarter Decisions: AI Applications in Voice Recognition, User Support, and Financial Services. </a:t>
+            </a:r>
+            <a:r>
+              <a:rPr lang="en-IN" i="1" dirty="0"/>
+              <a:t>Smarter Decisions: AI Applications in Voice Recognition, User Support, and Financial Services (August 18, 2025)</a:t>
+            </a:r>
+            <a:r>
+              <a:rPr lang="en-IN" dirty="0"/>
+              <a:t>.</a:t>
+            </a:r>
+          </a:p>
+          <a:p>
+            <a:r>
+              <a:rPr lang="en-IN" dirty="0" err="1"/>
+              <a:t>Henkens</a:t>
+            </a:r>
+            <a:r>
+              <a:rPr lang="en-IN" dirty="0"/>
+              <a:t>, B., Schultz, C. D., De Keyser, A., &amp; Mahr, D. (2026). The sound of progress: AI voice agents in service. </a:t>
+            </a:r>
+            <a:r>
+              <a:rPr lang="en-IN" i="1" dirty="0"/>
+              <a:t>Journal of Service Management</a:t>
+            </a:r>
+            <a:r>
+              <a:rPr lang="en-IN" dirty="0"/>
+              <a:t>, </a:t>
+            </a:r>
+            <a:r>
+              <a:rPr lang="en-IN" i="1" dirty="0"/>
+              <a:t>37</a:t>
+            </a:r>
+            <a:r>
+              <a:rPr lang="en-IN" dirty="0"/>
+              <a:t>(1), 1-32.</a:t>
+            </a:r>
+          </a:p>
+          <a:p>
+            <a:r>
+              <a:rPr lang="en-IN" dirty="0"/>
+              <a:t>Parthiban, E. S., &amp; Adil, M. (2023). Trends in the AI-based banking conversational agents literature: a bibliometric review. </a:t>
+            </a:r>
+            <a:r>
+              <a:rPr lang="en-IN" i="1" dirty="0"/>
+              <a:t>Asia pacific journal of information systems</a:t>
+            </a:r>
+            <a:r>
+              <a:rPr lang="en-IN" dirty="0"/>
+              <a:t>, </a:t>
+            </a:r>
+            <a:r>
+              <a:rPr lang="en-IN" i="1" dirty="0"/>
+              <a:t>33</a:t>
+            </a:r>
+            <a:r>
+              <a:rPr lang="en-IN" dirty="0"/>
+              <a:t>(3), 702-736.</a:t>
+            </a:r>
+          </a:p>
+        </p:txBody>
+      </p:sp>
+    </p:spTree>
+    <p:extLst>
+      <p:ext uri="{BB962C8B-B14F-4D97-AF65-F5344CB8AC3E}">
+        <p14:creationId xmlns:p14="http://schemas.microsoft.com/office/powerpoint/2010/main" val="52899601"/>
+      </p:ext>
+    </p:extLst>
+  </p:cSld>
+  <p:clrMapOvr>
+    <a:masterClrMapping/>
+  </p:clrMapOvr>
+</p:sld>
+</file>
+
+<file path=ppt/slides/slide9.xml><?xml version="1.0" encoding="utf-8"?>
+<p:sld xmlns:a="http://schemas.openxmlformats.org/drawingml/2006/main" xmlns:r="http://schemas.openxmlformats.org/officeDocument/2006/relationships" xmlns:p="http://schemas.openxmlformats.org/presentationml/2006/main">
+  <p:cSld>
+    <p:spTree>
+      <p:nvGrpSpPr>
+        <p:cNvPr id="1" name="">
+          <a:extLst>
+            <a:ext uri="{FF2B5EF4-FFF2-40B4-BE49-F238E27FC236}">
+              <a16:creationId xmlns:a16="http://schemas.microsoft.com/office/drawing/2014/main" id="{407AC10E-BAA4-0871-F56B-4D6EB74AB5DA}"/>
+            </a:ext>
+          </a:extLst>
+        </p:cNvPr>
+        <p:cNvGrpSpPr/>
+        <p:nvPr/>
+      </p:nvGrpSpPr>
+      <p:grpSpPr>
+        <a:xfrm>
+          <a:off x="0" y="0"/>
+          <a:ext cx="0" cy="0"/>
+          <a:chOff x="0" y="0"/>
+          <a:chExt cx="0" cy="0"/>
+        </a:xfrm>
+      </p:grpSpPr>
+      <p:sp>
+        <p:nvSpPr>
+          <p:cNvPr id="2" name="Title 1">
+            <a:extLst>
+              <a:ext uri="{FF2B5EF4-FFF2-40B4-BE49-F238E27FC236}">
+                <a16:creationId xmlns:a16="http://schemas.microsoft.com/office/drawing/2014/main" id="{D70092DC-C61C-3B18-D742-1900F41B2E12}"/>
+              </a:ext>
+            </a:extLst>
+          </p:cNvPr>
+          <p:cNvSpPr>
+            <a:spLocks noGrp="1"/>
+          </p:cNvSpPr>
+          <p:nvPr>
+            <p:ph type="title"/>
+          </p:nvPr>
+        </p:nvSpPr>
+        <p:spPr/>
+        <p:txBody>
+          <a:bodyPr/>
+          <a:lstStyle/>
+          <a:p>
+            <a:endParaRPr lang="en-IN"/>
+          </a:p>
+        </p:txBody>
+      </p:sp>
+      <p:sp>
+        <p:nvSpPr>
+          <p:cNvPr id="3" name="Content Placeholder 2">
+            <a:extLst>
+              <a:ext uri="{FF2B5EF4-FFF2-40B4-BE49-F238E27FC236}">
+                <a16:creationId xmlns:a16="http://schemas.microsoft.com/office/drawing/2014/main" id="{EF2EE86E-AFC8-8DF6-B6AB-4A95D13DACF1}"/>
+              </a:ext>
+            </a:extLst>
+          </p:cNvPr>
+          <p:cNvSpPr>
+            <a:spLocks noGrp="1"/>
+          </p:cNvSpPr>
+          <p:nvPr>
+            <p:ph idx="1"/>
+          </p:nvPr>
+        </p:nvSpPr>
+        <p:spPr/>
+        <p:txBody>
+          <a:bodyPr>
+            <a:normAutofit/>
+          </a:bodyPr>
+          <a:lstStyle/>
+          <a:p>
+            <a:r>
+              <a:rPr lang="en-IN" dirty="0"/>
+              <a:t>Mastrandrea, M. (2024). </a:t>
+            </a:r>
+            <a:r>
+              <a:rPr lang="en-IN" i="1" dirty="0"/>
+              <a:t>Developing an AI-Powered Voice Assistant for an iOS Payment App</a:t>
+            </a:r>
+            <a:r>
+              <a:rPr lang="en-IN" dirty="0"/>
+              <a:t> (Doctoral dissertation, </a:t>
+            </a:r>
+            <a:r>
+              <a:rPr lang="en-IN" dirty="0" err="1"/>
+              <a:t>Politecnico</a:t>
+            </a:r>
+            <a:r>
+              <a:rPr lang="en-IN" dirty="0"/>
+              <a:t> di Torino).</a:t>
+            </a:r>
+          </a:p>
+          <a:p>
+            <a:r>
+              <a:rPr lang="en-IN" dirty="0"/>
+              <a:t>Doherty, D., &amp; Curran, K. (2019, December). Chatbots for online banking services. In </a:t>
+            </a:r>
+            <a:r>
+              <a:rPr lang="en-IN" i="1" dirty="0"/>
+              <a:t>Web Intelligence</a:t>
+            </a:r>
+            <a:r>
+              <a:rPr lang="en-IN" dirty="0"/>
+              <a:t> (Vol. 17, No. 4, pp. 327-342). Sage UK: London, England: SAGE Publications.</a:t>
+            </a:r>
+          </a:p>
+          <a:p>
+            <a:r>
+              <a:rPr lang="en-IN" dirty="0"/>
+              <a:t>Paul, V. (2025). Voice AI Agents: The Technical Backbone of Modern Speech Interfaces. </a:t>
+            </a:r>
+            <a:r>
+              <a:rPr lang="en-IN" i="1" dirty="0"/>
+              <a:t>Journal Of Multidisciplinary</a:t>
+            </a:r>
+            <a:r>
+              <a:rPr lang="en-IN" dirty="0"/>
+              <a:t>, </a:t>
+            </a:r>
+            <a:r>
+              <a:rPr lang="en-IN" i="1" dirty="0"/>
+              <a:t>5</a:t>
+            </a:r>
+            <a:r>
+              <a:rPr lang="en-IN" dirty="0"/>
+              <a:t>(7), 610-617.</a:t>
+            </a:r>
+          </a:p>
+        </p:txBody>
+      </p:sp>
+    </p:spTree>
+    <p:extLst>
+      <p:ext uri="{BB962C8B-B14F-4D97-AF65-F5344CB8AC3E}">
+        <p14:creationId xmlns:p14="http://schemas.microsoft.com/office/powerpoint/2010/main" val="3833798129"/>
       </p:ext>
     </p:extLst>
   </p:cSld>

--- a/Zeroth review- Real-Time Voice AI Agent for Banking Support & Legal Research Assistant for Indian Courts.pptx
+++ b/Zeroth review- Real-Time Voice AI Agent for Banking Support & Legal Research Assistant for Indian Courts.pptx
@@ -3758,11 +3758,32 @@
         </p:spPr>
         <p:txBody>
           <a:bodyPr anchor="ctr">
-            <a:normAutofit/>
+            <a:normAutofit fontScale="90000"/>
           </a:bodyPr>
           <a:lstStyle/>
           <a:p>
             <a:pPr algn="r"/>
+            <a:r>
+              <a:rPr lang="en-US" sz="5600" dirty="0">
+                <a:solidFill>
+                  <a:schemeClr val="tx1">
+                    <a:lumMod val="75000"/>
+                    <a:lumOff val="25000"/>
+                  </a:schemeClr>
+                </a:solidFill>
+              </a:rPr>
+              <a:t>Zeroth Review:</a:t>
+            </a:r>
+            <a:br>
+              <a:rPr lang="en-US" sz="5600" dirty="0">
+                <a:solidFill>
+                  <a:schemeClr val="tx1">
+                    <a:lumMod val="75000"/>
+                    <a:lumOff val="25000"/>
+                  </a:schemeClr>
+                </a:solidFill>
+              </a:rPr>
+            </a:br>
             <a:r>
               <a:rPr lang="en-US" sz="5600" dirty="0">
                 <a:solidFill>
